--- a/ppt/final-n2-n3-4j.pptx
+++ b/ppt/final-n2-n3-4j.pptx
@@ -105,6 +105,11 @@
       </a:defRPr>
     </a:lvl9pPr>
   </p:defaultTextStyle>
+  <p:extLst>
+    <p:ext uri="{EFAFB233-063F-42B5-8137-9DF3F51BA10A}">
+      <p15:sldGuideLst xmlns:p15="http://schemas.microsoft.com/office/powerpoint/2012/main"/>
+    </p:ext>
+  </p:extLst>
 </p:presentation>
 </file>
 
@@ -255,7 +260,7 @@
           <a:p>
             <a:fld id="{21716C50-423B-6143-8AFF-74658B7394EB}" type="datetimeFigureOut">
               <a:rPr lang="fr-FR" smtClean="0"/>
-              <a:t>01/04/2026</a:t>
+              <a:t>09/04/2026</a:t>
             </a:fld>
             <a:endParaRPr lang="fr-FR"/>
           </a:p>
@@ -453,7 +458,7 @@
           <a:p>
             <a:fld id="{21716C50-423B-6143-8AFF-74658B7394EB}" type="datetimeFigureOut">
               <a:rPr lang="fr-FR" smtClean="0"/>
-              <a:t>01/04/2026</a:t>
+              <a:t>09/04/2026</a:t>
             </a:fld>
             <a:endParaRPr lang="fr-FR"/>
           </a:p>
@@ -661,7 +666,7 @@
           <a:p>
             <a:fld id="{21716C50-423B-6143-8AFF-74658B7394EB}" type="datetimeFigureOut">
               <a:rPr lang="fr-FR" smtClean="0"/>
-              <a:t>01/04/2026</a:t>
+              <a:t>09/04/2026</a:t>
             </a:fld>
             <a:endParaRPr lang="fr-FR"/>
           </a:p>
@@ -859,7 +864,7 @@
           <a:p>
             <a:fld id="{21716C50-423B-6143-8AFF-74658B7394EB}" type="datetimeFigureOut">
               <a:rPr lang="fr-FR" smtClean="0"/>
-              <a:t>01/04/2026</a:t>
+              <a:t>09/04/2026</a:t>
             </a:fld>
             <a:endParaRPr lang="fr-FR"/>
           </a:p>
@@ -1134,7 +1139,7 @@
           <a:p>
             <a:fld id="{21716C50-423B-6143-8AFF-74658B7394EB}" type="datetimeFigureOut">
               <a:rPr lang="fr-FR" smtClean="0"/>
-              <a:t>01/04/2026</a:t>
+              <a:t>09/04/2026</a:t>
             </a:fld>
             <a:endParaRPr lang="fr-FR"/>
           </a:p>
@@ -1399,7 +1404,7 @@
           <a:p>
             <a:fld id="{21716C50-423B-6143-8AFF-74658B7394EB}" type="datetimeFigureOut">
               <a:rPr lang="fr-FR" smtClean="0"/>
-              <a:t>01/04/2026</a:t>
+              <a:t>09/04/2026</a:t>
             </a:fld>
             <a:endParaRPr lang="fr-FR"/>
           </a:p>
@@ -1811,7 +1816,7 @@
           <a:p>
             <a:fld id="{21716C50-423B-6143-8AFF-74658B7394EB}" type="datetimeFigureOut">
               <a:rPr lang="fr-FR" smtClean="0"/>
-              <a:t>01/04/2026</a:t>
+              <a:t>09/04/2026</a:t>
             </a:fld>
             <a:endParaRPr lang="fr-FR"/>
           </a:p>
@@ -1952,7 +1957,7 @@
           <a:p>
             <a:fld id="{21716C50-423B-6143-8AFF-74658B7394EB}" type="datetimeFigureOut">
               <a:rPr lang="fr-FR" smtClean="0"/>
-              <a:t>01/04/2026</a:t>
+              <a:t>09/04/2026</a:t>
             </a:fld>
             <a:endParaRPr lang="fr-FR"/>
           </a:p>
@@ -2065,7 +2070,7 @@
           <a:p>
             <a:fld id="{21716C50-423B-6143-8AFF-74658B7394EB}" type="datetimeFigureOut">
               <a:rPr lang="fr-FR" smtClean="0"/>
-              <a:t>01/04/2026</a:t>
+              <a:t>09/04/2026</a:t>
             </a:fld>
             <a:endParaRPr lang="fr-FR"/>
           </a:p>
@@ -2376,7 +2381,7 @@
           <a:p>
             <a:fld id="{21716C50-423B-6143-8AFF-74658B7394EB}" type="datetimeFigureOut">
               <a:rPr lang="fr-FR" smtClean="0"/>
-              <a:t>01/04/2026</a:t>
+              <a:t>09/04/2026</a:t>
             </a:fld>
             <a:endParaRPr lang="fr-FR"/>
           </a:p>
@@ -2664,7 +2669,7 @@
           <a:p>
             <a:fld id="{21716C50-423B-6143-8AFF-74658B7394EB}" type="datetimeFigureOut">
               <a:rPr lang="fr-FR" smtClean="0"/>
-              <a:t>01/04/2026</a:t>
+              <a:t>09/04/2026</a:t>
             </a:fld>
             <a:endParaRPr lang="fr-FR"/>
           </a:p>
@@ -2905,7 +2910,7 @@
           <a:p>
             <a:fld id="{21716C50-423B-6143-8AFF-74658B7394EB}" type="datetimeFigureOut">
               <a:rPr lang="fr-FR" smtClean="0"/>
-              <a:t>01/04/2026</a:t>
+              <a:t>09/04/2026</a:t>
             </a:fld>
             <a:endParaRPr lang="fr-FR"/>
           </a:p>
@@ -3380,7 +3385,7 @@
           <p:nvPr>
             <p:extLst>
               <p:ext uri="{D42A27DB-BD31-4B8C-83A1-F6EECF244321}">
-                <p14:modId xmlns:p14="http://schemas.microsoft.com/office/powerpoint/2010/main" val="1870915805"/>
+                <p14:modId xmlns:p14="http://schemas.microsoft.com/office/powerpoint/2010/main" val="1262012410"/>
               </p:ext>
             </p:extLst>
           </p:nvPr>
@@ -3417,14 +3422,14 @@
                     </a:ext>
                   </a:extLst>
                 </a:gridCol>
-                <a:gridCol w="707166">
+                <a:gridCol w="981759">
                   <a:extLst>
                     <a:ext uri="{9D8B030D-6E8A-4147-A177-3AD203B41FA5}">
                       <a16:colId xmlns:a16="http://schemas.microsoft.com/office/drawing/2014/main" val="764055174"/>
                     </a:ext>
                   </a:extLst>
                 </a:gridCol>
-                <a:gridCol w="1070537">
+                <a:gridCol w="795944">
                   <a:extLst>
                     <a:ext uri="{9D8B030D-6E8A-4147-A177-3AD203B41FA5}">
                       <a16:colId xmlns:a16="http://schemas.microsoft.com/office/drawing/2014/main" val="2468205222"/>
@@ -3478,10 +3483,9 @@
                     <a:lstStyle/>
                     <a:p>
                       <a:r>
-                        <a:rPr lang="fr-FR" dirty="0" err="1"/>
-                        <a:t>Ass</a:t>
+                        <a:rPr lang="fr-FR" dirty="0"/>
+                        <a:t>Assist</a:t>
                       </a:r>
-                      <a:endParaRPr lang="fr-FR" dirty="0"/>
                     </a:p>
                   </a:txBody>
                   <a:tcPr/>
@@ -3491,7 +3495,10 @@
                     <a:bodyPr/>
                     <a:lstStyle/>
                     <a:p>
-                      <a:endParaRPr lang="fr-FR" dirty="0"/>
+                      <a:r>
+                        <a:rPr lang="fr-FR" dirty="0"/>
+                        <a:t>bloc</a:t>
+                      </a:r>
                     </a:p>
                   </a:txBody>
                   <a:tcPr/>
@@ -3560,7 +3567,10 @@
                     <a:bodyPr/>
                     <a:lstStyle/>
                     <a:p>
-                      <a:endParaRPr lang="fr-FR" sz="1200" dirty="0"/>
+                      <a:r>
+                        <a:rPr lang="fr-FR" sz="1200" dirty="0"/>
+                        <a:t>12l</a:t>
+                      </a:r>
                     </a:p>
                   </a:txBody>
                   <a:tcPr/>
@@ -3629,7 +3639,10 @@
                     <a:bodyPr/>
                     <a:lstStyle/>
                     <a:p>
-                      <a:endParaRPr lang="fr-FR" sz="1200" dirty="0"/>
+                      <a:r>
+                        <a:rPr lang="fr-FR" sz="1200" dirty="0"/>
+                        <a:t>15l</a:t>
+                      </a:r>
                     </a:p>
                   </a:txBody>
                   <a:tcPr/>
@@ -5360,7 +5373,7 @@
         <p:spPr>
           <a:xfrm>
             <a:off x="358009" y="2292908"/>
-            <a:ext cx="2879458" cy="830997"/>
+            <a:ext cx="2879458" cy="1200329"/>
           </a:xfrm>
           <a:prstGeom prst="rect">
             <a:avLst/>
@@ -5417,6 +5430,31 @@
               <a:rPr lang="fr-FR" sz="1200" dirty="0"/>
               <a:t>Orientation / Evolution</a:t>
             </a:r>
+          </a:p>
+          <a:p>
+            <a:pPr marL="171450" indent="-171450">
+              <a:buFont typeface="Arial" panose="020B0604020202020204" pitchFamily="34" charset="0"/>
+              <a:buChar char="•"/>
+            </a:pPr>
+            <a:r>
+              <a:rPr lang="fr-FR" sz="1200" dirty="0"/>
+              <a:t>Autonomie</a:t>
+            </a:r>
+          </a:p>
+          <a:p>
+            <a:pPr marL="171450" indent="-171450">
+              <a:buFont typeface="Arial" panose="020B0604020202020204" pitchFamily="34" charset="0"/>
+              <a:buChar char="•"/>
+            </a:pPr>
+            <a:r>
+              <a:rPr lang="fr-FR" sz="1200" dirty="0"/>
+              <a:t>Gestion </a:t>
+            </a:r>
+            <a:r>
+              <a:rPr lang="fr-FR" sz="1200" dirty="0" err="1"/>
+              <a:t>desaturation</a:t>
+            </a:r>
+            <a:endParaRPr lang="fr-FR" sz="1200" dirty="0"/>
           </a:p>
         </p:txBody>
       </p:sp>
@@ -5470,7 +5508,7 @@
             </a:pPr>
             <a:r>
               <a:rPr lang="fr-FR" sz="1200" dirty="0"/>
-              <a:t>VDM</a:t>
+              <a:t>VDM / REC (N2)</a:t>
             </a:r>
           </a:p>
           <a:p>
@@ -5480,7 +5518,7 @@
             </a:pPr>
             <a:r>
               <a:rPr lang="fr-FR" sz="1200" dirty="0"/>
-              <a:t>REC (N2)</a:t>
+              <a:t>Capelé</a:t>
             </a:r>
           </a:p>
           <a:p>
@@ -5603,10 +5641,10 @@
       </p:grpSpPr>
       <p:sp>
         <p:nvSpPr>
-          <p:cNvPr id="6" name="ZoneTexte 5">
-            <a:extLst>
-              <a:ext uri="{FF2B5EF4-FFF2-40B4-BE49-F238E27FC236}">
-                <a16:creationId xmlns:a16="http://schemas.microsoft.com/office/drawing/2014/main" id="{E506335B-2957-C93A-8F15-C3BFA74D8D75}"/>
+          <p:cNvPr id="4" name="ZoneTexte 3">
+            <a:extLst>
+              <a:ext uri="{FF2B5EF4-FFF2-40B4-BE49-F238E27FC236}">
+                <a16:creationId xmlns:a16="http://schemas.microsoft.com/office/drawing/2014/main" id="{BF839D48-6082-8C19-5E83-209AD9DCC824}"/>
               </a:ext>
             </a:extLst>
           </p:cNvPr>
@@ -5615,13 +5653,23 @@
         </p:nvSpPr>
         <p:spPr>
           <a:xfrm>
-            <a:off x="0" y="0"/>
-            <a:ext cx="12192000" cy="369264"/>
+            <a:off x="318917" y="183043"/>
+            <a:ext cx="3502456" cy="2308324"/>
           </a:xfrm>
           <a:prstGeom prst="rect">
             <a:avLst/>
           </a:prstGeom>
-          <a:noFill/>
+          <a:solidFill>
+            <a:schemeClr val="accent1">
+              <a:lumMod val="20000"/>
+              <a:lumOff val="80000"/>
+            </a:schemeClr>
+          </a:solidFill>
+          <a:ln>
+            <a:solidFill>
+              <a:schemeClr val="tx2"/>
+            </a:solidFill>
+          </a:ln>
         </p:spPr>
         <p:txBody>
           <a:bodyPr wrap="square" rtlCol="0">
@@ -5629,94 +5677,194 @@
           </a:bodyPr>
           <a:lstStyle/>
           <a:p>
-            <a:pPr algn="ctr"/>
-            <a:r>
-              <a:rPr lang="fr-FR" dirty="0"/>
-              <a:t>Approche &amp; évolution du lestage dans la plongée</a:t>
-            </a:r>
-          </a:p>
-        </p:txBody>
-      </p:sp>
-      <p:cxnSp>
-        <p:nvCxnSpPr>
-          <p:cNvPr id="8" name="Connecteur droit avec flèche 7">
-            <a:extLst>
-              <a:ext uri="{FF2B5EF4-FFF2-40B4-BE49-F238E27FC236}">
-                <a16:creationId xmlns:a16="http://schemas.microsoft.com/office/drawing/2014/main" id="{F9ACC660-8105-A6CC-AC29-AE316BF712D2}"/>
-              </a:ext>
-            </a:extLst>
-          </p:cNvPr>
-          <p:cNvCxnSpPr/>
+            <a:pPr marL="171450" indent="-171450">
+              <a:buFont typeface="Arial" panose="020B0604020202020204" pitchFamily="34" charset="0"/>
+              <a:buChar char="•"/>
+            </a:pPr>
+            <a:r>
+              <a:rPr lang="fr-FR" sz="1600" dirty="0"/>
+              <a:t>Barge alu, bloc 12l double sortie</a:t>
+            </a:r>
+          </a:p>
+          <a:p>
+            <a:pPr marL="171450" indent="-171450">
+              <a:buFont typeface="Arial" panose="020B0604020202020204" pitchFamily="34" charset="0"/>
+              <a:buChar char="•"/>
+            </a:pPr>
+            <a:r>
+              <a:rPr lang="fr-FR" sz="1600" dirty="0"/>
+              <a:t>Poss: CDS 322-78-1 et 322-78-2</a:t>
+            </a:r>
+          </a:p>
+          <a:p>
+            <a:pPr marL="628650" lvl="1" indent="-171450">
+              <a:buFont typeface="Arial" panose="020B0604020202020204" pitchFamily="34" charset="0"/>
+              <a:buChar char="•"/>
+            </a:pPr>
+            <a:r>
+              <a:rPr lang="fr-FR" sz="1600" dirty="0"/>
+              <a:t>Moyen de communication</a:t>
+            </a:r>
+          </a:p>
+          <a:p>
+            <a:pPr marL="628650" lvl="1" indent="-171450">
+              <a:buFont typeface="Arial" panose="020B0604020202020204" pitchFamily="34" charset="0"/>
+              <a:buChar char="•"/>
+            </a:pPr>
+            <a:r>
+              <a:rPr lang="fr-FR" sz="1600" dirty="0"/>
+              <a:t>Eau douce</a:t>
+            </a:r>
+          </a:p>
+          <a:p>
+            <a:pPr marL="628650" lvl="1" indent="-171450">
+              <a:buFont typeface="Arial" panose="020B0604020202020204" pitchFamily="34" charset="0"/>
+              <a:buChar char="•"/>
+            </a:pPr>
+            <a:r>
+              <a:rPr lang="fr-FR" sz="1600" dirty="0" err="1"/>
+              <a:t>Bavu</a:t>
+            </a:r>
+            <a:r>
+              <a:rPr lang="fr-FR" sz="1600" dirty="0"/>
+              <a:t> + 3 </a:t>
+            </a:r>
+            <a:r>
+              <a:rPr lang="fr-FR" sz="1600" dirty="0" err="1"/>
+              <a:t>mask</a:t>
+            </a:r>
+            <a:r>
+              <a:rPr lang="fr-FR" sz="1600" dirty="0"/>
+              <a:t> de 3 tailles</a:t>
+            </a:r>
+          </a:p>
+          <a:p>
+            <a:pPr marL="628650" lvl="1" indent="-171450">
+              <a:buFont typeface="Arial" panose="020B0604020202020204" pitchFamily="34" charset="0"/>
+              <a:buChar char="•"/>
+            </a:pPr>
+            <a:r>
+              <a:rPr lang="fr-FR" sz="1600" dirty="0"/>
+              <a:t>Mask haute concentration</a:t>
+            </a:r>
+          </a:p>
+          <a:p>
+            <a:pPr marL="628650" lvl="1" indent="-171450">
+              <a:buFont typeface="Arial" panose="020B0604020202020204" pitchFamily="34" charset="0"/>
+              <a:buChar char="•"/>
+            </a:pPr>
+            <a:r>
+              <a:rPr lang="fr-FR" sz="1600" dirty="0"/>
+              <a:t>Ensemble oxygénothérapie</a:t>
+            </a:r>
+          </a:p>
+          <a:p>
+            <a:pPr marL="628650" lvl="1" indent="-171450">
+              <a:buFont typeface="Arial" panose="020B0604020202020204" pitchFamily="34" charset="0"/>
+              <a:buChar char="•"/>
+            </a:pPr>
+            <a:r>
+              <a:rPr lang="fr-FR" sz="1600" dirty="0"/>
+              <a:t>Couverture isotherme</a:t>
+            </a:r>
+          </a:p>
+          <a:p>
+            <a:pPr marL="628650" lvl="1" indent="-171450">
+              <a:buFont typeface="Arial" panose="020B0604020202020204" pitchFamily="34" charset="0"/>
+              <a:buChar char="•"/>
+            </a:pPr>
+            <a:r>
+              <a:rPr lang="fr-FR" sz="1600" dirty="0"/>
+              <a:t>Fiches d’évacuation</a:t>
+            </a:r>
+          </a:p>
+        </p:txBody>
+      </p:sp>
+      <p:sp>
+        <p:nvSpPr>
+          <p:cNvPr id="5" name="ZoneTexte 4">
+            <a:extLst>
+              <a:ext uri="{FF2B5EF4-FFF2-40B4-BE49-F238E27FC236}">
+                <a16:creationId xmlns:a16="http://schemas.microsoft.com/office/drawing/2014/main" id="{F4A476DD-181B-A34A-F47E-244472F433DC}"/>
+              </a:ext>
+            </a:extLst>
+          </p:cNvPr>
+          <p:cNvSpPr txBox="1"/>
           <p:nvPr/>
-        </p:nvCxnSpPr>
+        </p:nvSpPr>
         <p:spPr>
           <a:xfrm>
-            <a:off x="142875" y="1300163"/>
-            <a:ext cx="11715750" cy="0"/>
-          </a:xfrm>
-          <a:prstGeom prst="straightConnector1">
-            <a:avLst/>
-          </a:prstGeom>
-          <a:ln>
-            <a:tailEnd type="triangle"/>
-          </a:ln>
-        </p:spPr>
-        <p:style>
-          <a:lnRef idx="2">
-            <a:schemeClr val="accent1"/>
-          </a:lnRef>
-          <a:fillRef idx="0">
-            <a:schemeClr val="accent1"/>
-          </a:fillRef>
-          <a:effectRef idx="1">
-            <a:schemeClr val="accent1"/>
-          </a:effectRef>
-          <a:fontRef idx="minor">
-            <a:schemeClr val="tx1"/>
-          </a:fontRef>
-        </p:style>
-      </p:cxnSp>
-      <p:sp>
-        <p:nvSpPr>
-          <p:cNvPr id="9" name="ZoneTexte 8">
-            <a:extLst>
-              <a:ext uri="{FF2B5EF4-FFF2-40B4-BE49-F238E27FC236}">
-                <a16:creationId xmlns:a16="http://schemas.microsoft.com/office/drawing/2014/main" id="{AF2BF53E-ACD3-F59A-5C07-7A25BBAF89FE}"/>
-              </a:ext>
-            </a:extLst>
-          </p:cNvPr>
-          <p:cNvSpPr txBox="1"/>
-          <p:nvPr/>
-        </p:nvSpPr>
-        <p:spPr>
-          <a:xfrm>
-            <a:off x="271463" y="985838"/>
-            <a:ext cx="679994" cy="369332"/>
+            <a:off x="4344772" y="183043"/>
+            <a:ext cx="3502456" cy="1077218"/>
           </a:xfrm>
           <a:prstGeom prst="rect">
             <a:avLst/>
           </a:prstGeom>
-          <a:noFill/>
+          <a:solidFill>
+            <a:schemeClr val="accent1">
+              <a:lumMod val="20000"/>
+              <a:lumOff val="80000"/>
+            </a:schemeClr>
+          </a:solidFill>
+          <a:ln>
+            <a:solidFill>
+              <a:schemeClr val="tx2"/>
+            </a:solidFill>
+          </a:ln>
         </p:spPr>
         <p:txBody>
-          <a:bodyPr wrap="none" rtlCol="0">
+          <a:bodyPr wrap="square" rtlCol="0">
             <a:spAutoFit/>
           </a:bodyPr>
           <a:lstStyle/>
           <a:p>
-            <a:r>
-              <a:rPr lang="fr-FR" dirty="0"/>
-              <a:t>-250 </a:t>
-            </a:r>
-          </a:p>
-        </p:txBody>
-      </p:sp>
-      <p:sp>
-        <p:nvSpPr>
-          <p:cNvPr id="10" name="ZoneTexte 9">
-            <a:extLst>
-              <a:ext uri="{FF2B5EF4-FFF2-40B4-BE49-F238E27FC236}">
-                <a16:creationId xmlns:a16="http://schemas.microsoft.com/office/drawing/2014/main" id="{4A8FF39C-63A4-BD5E-3083-FB004BE7FF2E}"/>
+            <a:pPr marL="171450" indent="-171450">
+              <a:buFont typeface="Arial" panose="020B0604020202020204" pitchFamily="34" charset="0"/>
+              <a:buChar char="•"/>
+            </a:pPr>
+            <a:r>
+              <a:rPr lang="fr-FR" sz="1600" dirty="0"/>
+              <a:t>Plongée yoyo</a:t>
+            </a:r>
+          </a:p>
+          <a:p>
+            <a:pPr marL="628650" lvl="1" indent="-171450">
+              <a:buFont typeface="Arial" panose="020B0604020202020204" pitchFamily="34" charset="0"/>
+              <a:buChar char="•"/>
+            </a:pPr>
+            <a:r>
+              <a:rPr lang="fr-FR" sz="1600" dirty="0"/>
+              <a:t>5min à 1/2 profondeur</a:t>
+            </a:r>
+          </a:p>
+          <a:p>
+            <a:pPr marL="628650" lvl="1" indent="-171450">
+              <a:buFont typeface="Arial" panose="020B0604020202020204" pitchFamily="34" charset="0"/>
+              <a:buChar char="•"/>
+            </a:pPr>
+            <a:r>
+              <a:rPr lang="fr-FR" sz="1600" dirty="0"/>
+              <a:t>1 min à 6</a:t>
+            </a:r>
+          </a:p>
+          <a:p>
+            <a:pPr marL="628650" lvl="1" indent="-171450">
+              <a:buFont typeface="Arial" panose="020B0604020202020204" pitchFamily="34" charset="0"/>
+              <a:buChar char="•"/>
+            </a:pPr>
+            <a:r>
+              <a:rPr lang="fr-FR" sz="1600" dirty="0"/>
+              <a:t>5 min à 3-5m</a:t>
+            </a:r>
+          </a:p>
+        </p:txBody>
+      </p:sp>
+      <p:sp>
+        <p:nvSpPr>
+          <p:cNvPr id="6" name="ZoneTexte 5">
+            <a:extLst>
+              <a:ext uri="{FF2B5EF4-FFF2-40B4-BE49-F238E27FC236}">
+                <a16:creationId xmlns:a16="http://schemas.microsoft.com/office/drawing/2014/main" id="{22E0E1AA-499F-2770-669A-033B065BE518}"/>
               </a:ext>
             </a:extLst>
           </p:cNvPr>
@@ -5725,75 +5873,152 @@
         </p:nvSpPr>
         <p:spPr>
           <a:xfrm>
-            <a:off x="176704" y="1340705"/>
-            <a:ext cx="2258823" cy="954107"/>
+            <a:off x="318917" y="3078643"/>
+            <a:ext cx="3502456" cy="2800767"/>
           </a:xfrm>
           <a:prstGeom prst="rect">
             <a:avLst/>
           </a:prstGeom>
-          <a:noFill/>
+          <a:solidFill>
+            <a:schemeClr val="accent1">
+              <a:lumMod val="20000"/>
+              <a:lumOff val="80000"/>
+            </a:schemeClr>
+          </a:solidFill>
+          <a:ln>
+            <a:solidFill>
+              <a:schemeClr val="tx2"/>
+            </a:solidFill>
+          </a:ln>
         </p:spPr>
         <p:txBody>
-          <a:bodyPr wrap="none" rtlCol="0">
+          <a:bodyPr wrap="square" rtlCol="0">
             <a:spAutoFit/>
           </a:bodyPr>
           <a:lstStyle/>
           <a:p>
-            <a:pPr marL="285750" indent="-285750">
+            <a:pPr marL="171450" indent="-171450">
               <a:buFont typeface="Arial" panose="020B0604020202020204" pitchFamily="34" charset="0"/>
               <a:buChar char="•"/>
             </a:pPr>
             <a:r>
-              <a:rPr lang="fr-FR" sz="1400" dirty="0"/>
-              <a:t>Archimède</a:t>
-            </a:r>
-          </a:p>
-          <a:p>
-            <a:pPr marL="285750" indent="-285750">
+              <a:rPr lang="fr-FR" sz="1600" dirty="0"/>
+              <a:t>N2</a:t>
+            </a:r>
+          </a:p>
+          <a:p>
+            <a:pPr marL="628650" lvl="1" indent="-171450">
               <a:buFont typeface="Arial" panose="020B0604020202020204" pitchFamily="34" charset="0"/>
               <a:buChar char="•"/>
             </a:pPr>
             <a:r>
-              <a:rPr lang="fr-FR" sz="1400" dirty="0" err="1"/>
-              <a:t>Grècs</a:t>
-            </a:r>
-            <a:r>
-              <a:rPr lang="fr-FR" sz="1400" dirty="0"/>
-              <a:t> inventent:</a:t>
-            </a:r>
-          </a:p>
-          <a:p>
-            <a:pPr marL="742950" lvl="1" indent="-285750">
+              <a:rPr lang="fr-FR" sz="1600" dirty="0"/>
+              <a:t>Mise à l’eau</a:t>
+            </a:r>
+          </a:p>
+          <a:p>
+            <a:pPr marL="628650" lvl="1" indent="-171450">
               <a:buFont typeface="Arial" panose="020B0604020202020204" pitchFamily="34" charset="0"/>
               <a:buChar char="•"/>
             </a:pPr>
             <a:r>
-              <a:rPr lang="fr-FR" sz="1400" dirty="0"/>
-              <a:t>Sac filet</a:t>
-            </a:r>
-          </a:p>
-          <a:p>
-            <a:pPr marL="742950" lvl="1" indent="-285750">
+              <a:rPr lang="fr-FR" sz="1600" dirty="0"/>
+              <a:t>Gestion matériel</a:t>
+            </a:r>
+          </a:p>
+          <a:p>
+            <a:pPr marL="628650" lvl="1" indent="-171450">
               <a:buFont typeface="Arial" panose="020B0604020202020204" pitchFamily="34" charset="0"/>
               <a:buChar char="•"/>
             </a:pPr>
             <a:r>
-              <a:rPr lang="fr-FR" sz="1400" dirty="0" err="1"/>
-              <a:t>Ancetre</a:t>
-            </a:r>
-            <a:r>
-              <a:rPr lang="fr-FR" sz="1400" dirty="0"/>
-              <a:t> bouteille</a:t>
-            </a:r>
-          </a:p>
-        </p:txBody>
-      </p:sp>
-      <p:sp>
-        <p:nvSpPr>
-          <p:cNvPr id="11" name="ZoneTexte 10">
-            <a:extLst>
-              <a:ext uri="{FF2B5EF4-FFF2-40B4-BE49-F238E27FC236}">
-                <a16:creationId xmlns:a16="http://schemas.microsoft.com/office/drawing/2014/main" id="{058A9445-F54D-07D4-BC9C-E19A26DAA4AB}"/>
+              <a:rPr lang="fr-FR" sz="1600" dirty="0"/>
+              <a:t>Capelé 250m</a:t>
+            </a:r>
+          </a:p>
+          <a:p>
+            <a:pPr marL="628650" lvl="1" indent="-171450">
+              <a:buFont typeface="Arial" panose="020B0604020202020204" pitchFamily="34" charset="0"/>
+              <a:buChar char="•"/>
+            </a:pPr>
+            <a:r>
+              <a:rPr lang="fr-FR" sz="1600" dirty="0"/>
+              <a:t>REC 10m</a:t>
+            </a:r>
+          </a:p>
+          <a:p>
+            <a:pPr marL="628650" lvl="1" indent="-171450">
+              <a:buFont typeface="Arial" panose="020B0604020202020204" pitchFamily="34" charset="0"/>
+              <a:buChar char="•"/>
+            </a:pPr>
+            <a:r>
+              <a:rPr lang="fr-FR" sz="1600" dirty="0"/>
+              <a:t>Déplacement propre</a:t>
+            </a:r>
+          </a:p>
+          <a:p>
+            <a:pPr marL="628650" lvl="1" indent="-171450">
+              <a:buFont typeface="Arial" panose="020B0604020202020204" pitchFamily="34" charset="0"/>
+              <a:buChar char="•"/>
+            </a:pPr>
+            <a:r>
+              <a:rPr lang="fr-FR" sz="1600" dirty="0"/>
+              <a:t>Planification</a:t>
+            </a:r>
+          </a:p>
+          <a:p>
+            <a:pPr marL="628650" lvl="1" indent="-171450">
+              <a:buFont typeface="Arial" panose="020B0604020202020204" pitchFamily="34" charset="0"/>
+              <a:buChar char="•"/>
+            </a:pPr>
+            <a:r>
+              <a:rPr lang="fr-FR" sz="1600" dirty="0"/>
+              <a:t>Autonomie / Orientation</a:t>
+            </a:r>
+          </a:p>
+          <a:p>
+            <a:pPr marL="628650" lvl="1" indent="-171450">
+              <a:buFont typeface="Arial" panose="020B0604020202020204" pitchFamily="34" charset="0"/>
+              <a:buChar char="•"/>
+            </a:pPr>
+            <a:r>
+              <a:rPr lang="fr-FR" sz="1600" dirty="0"/>
+              <a:t>Gestion </a:t>
+            </a:r>
+            <a:r>
+              <a:rPr lang="fr-FR" sz="1600" dirty="0" err="1"/>
+              <a:t>desaturation</a:t>
+            </a:r>
+            <a:endParaRPr lang="fr-FR" sz="1600" dirty="0"/>
+          </a:p>
+          <a:p>
+            <a:pPr marL="628650" lvl="1" indent="-171450">
+              <a:buFont typeface="Arial" panose="020B0604020202020204" pitchFamily="34" charset="0"/>
+              <a:buChar char="•"/>
+            </a:pPr>
+            <a:r>
+              <a:rPr lang="fr-FR" sz="1600" dirty="0"/>
+              <a:t>IPD 20m  2 x 2</a:t>
+            </a:r>
+          </a:p>
+          <a:p>
+            <a:pPr marL="628650" lvl="1" indent="-171450">
+              <a:buFont typeface="Arial" panose="020B0604020202020204" pitchFamily="34" charset="0"/>
+              <a:buChar char="•"/>
+            </a:pPr>
+            <a:r>
+              <a:rPr lang="fr-FR" sz="1600" dirty="0"/>
+              <a:t>VDM à 20m</a:t>
+            </a:r>
+          </a:p>
+        </p:txBody>
+      </p:sp>
+      <p:sp>
+        <p:nvSpPr>
+          <p:cNvPr id="7" name="ZoneTexte 6">
+            <a:extLst>
+              <a:ext uri="{FF2B5EF4-FFF2-40B4-BE49-F238E27FC236}">
+                <a16:creationId xmlns:a16="http://schemas.microsoft.com/office/drawing/2014/main" id="{289956A0-343A-1AB4-DF95-59BBA57DD3F2}"/>
               </a:ext>
             </a:extLst>
           </p:cNvPr>
@@ -5802,760 +6027,92 @@
         </p:nvSpPr>
         <p:spPr>
           <a:xfrm>
-            <a:off x="2344391" y="930831"/>
-            <a:ext cx="308098" cy="369332"/>
+            <a:off x="4344772" y="3078642"/>
+            <a:ext cx="3502456" cy="1569660"/>
           </a:xfrm>
           <a:prstGeom prst="rect">
             <a:avLst/>
           </a:prstGeom>
-          <a:noFill/>
+          <a:solidFill>
+            <a:schemeClr val="accent1">
+              <a:lumMod val="20000"/>
+              <a:lumOff val="80000"/>
+            </a:schemeClr>
+          </a:solidFill>
+          <a:ln>
+            <a:solidFill>
+              <a:schemeClr val="tx2"/>
+            </a:solidFill>
+          </a:ln>
         </p:spPr>
         <p:txBody>
-          <a:bodyPr wrap="none" rtlCol="0">
+          <a:bodyPr wrap="square" rtlCol="0">
             <a:spAutoFit/>
           </a:bodyPr>
           <a:lstStyle/>
           <a:p>
-            <a:r>
-              <a:rPr lang="fr-FR" dirty="0"/>
-              <a:t>0</a:t>
-            </a:r>
-          </a:p>
-        </p:txBody>
-      </p:sp>
-      <p:sp>
-        <p:nvSpPr>
-          <p:cNvPr id="12" name="ZoneTexte 11">
-            <a:extLst>
-              <a:ext uri="{FF2B5EF4-FFF2-40B4-BE49-F238E27FC236}">
-                <a16:creationId xmlns:a16="http://schemas.microsoft.com/office/drawing/2014/main" id="{38DBC368-0BC9-3488-1FC6-02F7A2C97447}"/>
-              </a:ext>
-            </a:extLst>
-          </p:cNvPr>
-          <p:cNvSpPr txBox="1"/>
-          <p:nvPr/>
-        </p:nvSpPr>
-        <p:spPr>
-          <a:xfrm>
-            <a:off x="2344391" y="1307664"/>
-            <a:ext cx="1463029" cy="738664"/>
-          </a:xfrm>
-          <a:prstGeom prst="rect">
-            <a:avLst/>
-          </a:prstGeom>
-          <a:noFill/>
-        </p:spPr>
-        <p:txBody>
-          <a:bodyPr wrap="none" rtlCol="0">
-            <a:spAutoFit/>
-          </a:bodyPr>
-          <a:lstStyle/>
-          <a:p>
-            <a:r>
-              <a:rPr lang="fr-FR" sz="1400" dirty="0"/>
-              <a:t>Allergie à</a:t>
-            </a:r>
-          </a:p>
-          <a:p>
-            <a:r>
-              <a:rPr lang="fr-FR" sz="1400" dirty="0"/>
-              <a:t>La plongée</a:t>
-            </a:r>
-          </a:p>
-          <a:p>
-            <a:r>
-              <a:rPr lang="fr-FR" sz="1400" dirty="0"/>
-              <a:t>Marche sur l’eau</a:t>
-            </a:r>
-          </a:p>
-        </p:txBody>
-      </p:sp>
-      <p:sp>
-        <p:nvSpPr>
-          <p:cNvPr id="13" name="ZoneTexte 12">
-            <a:extLst>
-              <a:ext uri="{FF2B5EF4-FFF2-40B4-BE49-F238E27FC236}">
-                <a16:creationId xmlns:a16="http://schemas.microsoft.com/office/drawing/2014/main" id="{DE80BF7C-197C-5DB1-F2DC-96CCAA411D5A}"/>
-              </a:ext>
-            </a:extLst>
-          </p:cNvPr>
-          <p:cNvSpPr txBox="1"/>
-          <p:nvPr/>
-        </p:nvSpPr>
-        <p:spPr>
-          <a:xfrm>
-            <a:off x="4286963" y="959406"/>
-            <a:ext cx="1276568" cy="369332"/>
-          </a:xfrm>
-          <a:prstGeom prst="rect">
-            <a:avLst/>
-          </a:prstGeom>
-          <a:noFill/>
-        </p:spPr>
-        <p:txBody>
-          <a:bodyPr wrap="none" rtlCol="0">
-            <a:spAutoFit/>
-          </a:bodyPr>
-          <a:lstStyle/>
-          <a:p>
-            <a:r>
-              <a:rPr lang="fr-FR" dirty="0"/>
-              <a:t>Moyen-âge</a:t>
-            </a:r>
-          </a:p>
-        </p:txBody>
-      </p:sp>
-      <p:sp>
-        <p:nvSpPr>
-          <p:cNvPr id="14" name="ZoneTexte 13">
-            <a:extLst>
-              <a:ext uri="{FF2B5EF4-FFF2-40B4-BE49-F238E27FC236}">
-                <a16:creationId xmlns:a16="http://schemas.microsoft.com/office/drawing/2014/main" id="{41AE1565-7403-420A-1252-BB8222B3959B}"/>
-              </a:ext>
-            </a:extLst>
-          </p:cNvPr>
-          <p:cNvSpPr txBox="1"/>
-          <p:nvPr/>
-        </p:nvSpPr>
-        <p:spPr>
-          <a:xfrm>
-            <a:off x="4286963" y="1355170"/>
-            <a:ext cx="1134349" cy="954107"/>
-          </a:xfrm>
-          <a:prstGeom prst="rect">
-            <a:avLst/>
-          </a:prstGeom>
-          <a:noFill/>
-        </p:spPr>
-        <p:txBody>
-          <a:bodyPr wrap="none" rtlCol="0">
-            <a:spAutoFit/>
-          </a:bodyPr>
-          <a:lstStyle/>
-          <a:p>
-            <a:r>
-              <a:rPr lang="fr-FR" sz="1400" dirty="0"/>
-              <a:t>Robin</a:t>
-            </a:r>
-          </a:p>
-          <a:p>
-            <a:r>
-              <a:rPr lang="fr-FR" sz="1400" dirty="0"/>
-              <a:t>Invente</a:t>
-            </a:r>
-          </a:p>
-          <a:p>
-            <a:r>
-              <a:rPr lang="fr-FR" sz="1400" dirty="0"/>
-              <a:t>Tuba pour</a:t>
-            </a:r>
-          </a:p>
-          <a:p>
-            <a:r>
-              <a:rPr lang="fr-FR" sz="1400" dirty="0"/>
-              <a:t>Fuir le shérif</a:t>
-            </a:r>
-          </a:p>
-        </p:txBody>
-      </p:sp>
-      <p:sp>
-        <p:nvSpPr>
-          <p:cNvPr id="15" name="ZoneTexte 14">
-            <a:extLst>
-              <a:ext uri="{FF2B5EF4-FFF2-40B4-BE49-F238E27FC236}">
-                <a16:creationId xmlns:a16="http://schemas.microsoft.com/office/drawing/2014/main" id="{B0A2DD33-3214-1777-CDAB-71AF3B457304}"/>
-              </a:ext>
-            </a:extLst>
-          </p:cNvPr>
-          <p:cNvSpPr txBox="1"/>
-          <p:nvPr/>
-        </p:nvSpPr>
-        <p:spPr>
-          <a:xfrm>
-            <a:off x="6272213" y="985838"/>
-            <a:ext cx="622286" cy="369332"/>
-          </a:xfrm>
-          <a:prstGeom prst="rect">
-            <a:avLst/>
-          </a:prstGeom>
-          <a:noFill/>
-        </p:spPr>
-        <p:txBody>
-          <a:bodyPr wrap="none" rtlCol="0">
-            <a:spAutoFit/>
-          </a:bodyPr>
-          <a:lstStyle/>
-          <a:p>
-            <a:r>
-              <a:rPr lang="fr-FR" dirty="0" err="1"/>
-              <a:t>XIXè</a:t>
-            </a:r>
-            <a:endParaRPr lang="fr-FR" dirty="0"/>
-          </a:p>
-        </p:txBody>
-      </p:sp>
-      <p:sp>
-        <p:nvSpPr>
-          <p:cNvPr id="16" name="ZoneTexte 15">
-            <a:extLst>
-              <a:ext uri="{FF2B5EF4-FFF2-40B4-BE49-F238E27FC236}">
-                <a16:creationId xmlns:a16="http://schemas.microsoft.com/office/drawing/2014/main" id="{10731A18-31CC-40F8-59CA-8D7C2CE4110F}"/>
-              </a:ext>
-            </a:extLst>
-          </p:cNvPr>
-          <p:cNvSpPr txBox="1"/>
-          <p:nvPr/>
-        </p:nvSpPr>
-        <p:spPr>
-          <a:xfrm>
-            <a:off x="6272213" y="1362671"/>
-            <a:ext cx="1178528" cy="738664"/>
-          </a:xfrm>
-          <a:prstGeom prst="rect">
-            <a:avLst/>
-          </a:prstGeom>
-          <a:noFill/>
-        </p:spPr>
-        <p:txBody>
-          <a:bodyPr wrap="none" rtlCol="0">
-            <a:spAutoFit/>
-          </a:bodyPr>
-          <a:lstStyle/>
-          <a:p>
-            <a:r>
-              <a:rPr lang="fr-FR" sz="1400" dirty="0"/>
-              <a:t>Pied lourd</a:t>
-            </a:r>
-          </a:p>
-          <a:p>
-            <a:r>
-              <a:rPr lang="fr-FR" sz="1400" dirty="0"/>
-              <a:t>9 kg dans </a:t>
-            </a:r>
-          </a:p>
-          <a:p>
-            <a:r>
-              <a:rPr lang="fr-FR" sz="1400" dirty="0"/>
-              <a:t>Chaque pied</a:t>
-            </a:r>
-          </a:p>
-        </p:txBody>
-      </p:sp>
-      <p:sp>
-        <p:nvSpPr>
-          <p:cNvPr id="17" name="ZoneTexte 16">
-            <a:extLst>
-              <a:ext uri="{FF2B5EF4-FFF2-40B4-BE49-F238E27FC236}">
-                <a16:creationId xmlns:a16="http://schemas.microsoft.com/office/drawing/2014/main" id="{B0685CE6-4419-EDB9-4CD4-82A24BFA7463}"/>
-              </a:ext>
-            </a:extLst>
-          </p:cNvPr>
-          <p:cNvSpPr txBox="1"/>
-          <p:nvPr/>
-        </p:nvSpPr>
-        <p:spPr>
-          <a:xfrm>
-            <a:off x="8515658" y="930831"/>
-            <a:ext cx="1223412" cy="369332"/>
-          </a:xfrm>
-          <a:prstGeom prst="rect">
-            <a:avLst/>
-          </a:prstGeom>
-          <a:noFill/>
-        </p:spPr>
-        <p:txBody>
-          <a:bodyPr wrap="none" rtlCol="0">
-            <a:spAutoFit/>
-          </a:bodyPr>
-          <a:lstStyle/>
-          <a:p>
-            <a:r>
-              <a:rPr lang="fr-FR" dirty="0"/>
-              <a:t>Début </a:t>
-            </a:r>
-            <a:r>
-              <a:rPr lang="fr-FR" dirty="0" err="1"/>
-              <a:t>XXè</a:t>
-            </a:r>
-            <a:endParaRPr lang="fr-FR" dirty="0"/>
-          </a:p>
-        </p:txBody>
-      </p:sp>
-      <p:sp>
-        <p:nvSpPr>
-          <p:cNvPr id="18" name="ZoneTexte 17">
-            <a:extLst>
-              <a:ext uri="{FF2B5EF4-FFF2-40B4-BE49-F238E27FC236}">
-                <a16:creationId xmlns:a16="http://schemas.microsoft.com/office/drawing/2014/main" id="{73F34E5F-EC4E-9E4B-14BF-263E1438FC7C}"/>
-              </a:ext>
-            </a:extLst>
-          </p:cNvPr>
-          <p:cNvSpPr txBox="1"/>
-          <p:nvPr/>
-        </p:nvSpPr>
-        <p:spPr>
-          <a:xfrm>
-            <a:off x="8515658" y="1362671"/>
-            <a:ext cx="1515351" cy="1169551"/>
-          </a:xfrm>
-          <a:prstGeom prst="rect">
-            <a:avLst/>
-          </a:prstGeom>
-          <a:noFill/>
-        </p:spPr>
-        <p:txBody>
-          <a:bodyPr wrap="none" rtlCol="0">
-            <a:spAutoFit/>
-          </a:bodyPr>
-          <a:lstStyle/>
-          <a:p>
-            <a:r>
-              <a:rPr lang="fr-FR" sz="1400" dirty="0"/>
-              <a:t>Mafia invente</a:t>
-            </a:r>
-          </a:p>
-          <a:p>
-            <a:r>
-              <a:rPr lang="fr-FR" sz="1400" dirty="0"/>
-              <a:t>Le lestage </a:t>
-            </a:r>
-          </a:p>
-          <a:p>
-            <a:r>
-              <a:rPr lang="fr-FR" sz="1400" dirty="0"/>
-              <a:t>sur mesure</a:t>
-            </a:r>
-          </a:p>
-          <a:p>
-            <a:r>
-              <a:rPr lang="fr-FR" sz="1400" dirty="0"/>
-              <a:t>Avec le recyclage</a:t>
-            </a:r>
-          </a:p>
-          <a:p>
-            <a:r>
-              <a:rPr lang="fr-FR" sz="1400" dirty="0"/>
-              <a:t>Des matériaux</a:t>
-            </a:r>
-          </a:p>
-        </p:txBody>
-      </p:sp>
-      <p:cxnSp>
-        <p:nvCxnSpPr>
-          <p:cNvPr id="19" name="Connecteur droit avec flèche 18">
-            <a:extLst>
-              <a:ext uri="{FF2B5EF4-FFF2-40B4-BE49-F238E27FC236}">
-                <a16:creationId xmlns:a16="http://schemas.microsoft.com/office/drawing/2014/main" id="{AC405E11-08E9-790A-9AAA-5B64C4B5C1EC}"/>
-              </a:ext>
-            </a:extLst>
-          </p:cNvPr>
-          <p:cNvCxnSpPr/>
-          <p:nvPr/>
-        </p:nvCxnSpPr>
-        <p:spPr>
-          <a:xfrm>
-            <a:off x="176704" y="4738688"/>
-            <a:ext cx="11715750" cy="0"/>
-          </a:xfrm>
-          <a:prstGeom prst="straightConnector1">
-            <a:avLst/>
-          </a:prstGeom>
-          <a:ln>
-            <a:tailEnd type="triangle"/>
-          </a:ln>
-        </p:spPr>
-        <p:style>
-          <a:lnRef idx="2">
-            <a:schemeClr val="accent1"/>
-          </a:lnRef>
-          <a:fillRef idx="0">
-            <a:schemeClr val="accent1"/>
-          </a:fillRef>
-          <a:effectRef idx="1">
-            <a:schemeClr val="accent1"/>
-          </a:effectRef>
-          <a:fontRef idx="minor">
-            <a:schemeClr val="tx1"/>
-          </a:fontRef>
-        </p:style>
-      </p:cxnSp>
-      <p:sp>
-        <p:nvSpPr>
-          <p:cNvPr id="20" name="ZoneTexte 19">
-            <a:extLst>
-              <a:ext uri="{FF2B5EF4-FFF2-40B4-BE49-F238E27FC236}">
-                <a16:creationId xmlns:a16="http://schemas.microsoft.com/office/drawing/2014/main" id="{A5711179-6ABC-126C-A564-1DB3815570F7}"/>
-              </a:ext>
-            </a:extLst>
-          </p:cNvPr>
-          <p:cNvSpPr txBox="1"/>
-          <p:nvPr/>
-        </p:nvSpPr>
-        <p:spPr>
-          <a:xfrm>
-            <a:off x="611460" y="4243388"/>
-            <a:ext cx="678391" cy="369332"/>
-          </a:xfrm>
-          <a:prstGeom prst="rect">
-            <a:avLst/>
-          </a:prstGeom>
-          <a:noFill/>
-        </p:spPr>
-        <p:txBody>
-          <a:bodyPr wrap="none" rtlCol="0">
-            <a:spAutoFit/>
-          </a:bodyPr>
-          <a:lstStyle/>
-          <a:p>
-            <a:r>
-              <a:rPr lang="fr-FR" dirty="0"/>
-              <a:t>1942</a:t>
-            </a:r>
-          </a:p>
-        </p:txBody>
-      </p:sp>
-      <p:sp>
-        <p:nvSpPr>
-          <p:cNvPr id="21" name="ZoneTexte 20">
-            <a:extLst>
-              <a:ext uri="{FF2B5EF4-FFF2-40B4-BE49-F238E27FC236}">
-                <a16:creationId xmlns:a16="http://schemas.microsoft.com/office/drawing/2014/main" id="{819C9D51-4CA4-4B14-D3DF-EB3C048D166F}"/>
-              </a:ext>
-            </a:extLst>
-          </p:cNvPr>
-          <p:cNvSpPr txBox="1"/>
-          <p:nvPr/>
-        </p:nvSpPr>
-        <p:spPr>
-          <a:xfrm>
-            <a:off x="543688" y="4738687"/>
-            <a:ext cx="2077813" cy="954107"/>
-          </a:xfrm>
-          <a:prstGeom prst="rect">
-            <a:avLst/>
-          </a:prstGeom>
-          <a:noFill/>
-        </p:spPr>
-        <p:txBody>
-          <a:bodyPr wrap="none" rtlCol="0">
-            <a:spAutoFit/>
-          </a:bodyPr>
-          <a:lstStyle/>
-          <a:p>
-            <a:r>
-              <a:rPr lang="fr-FR" sz="1400" dirty="0"/>
-              <a:t>Mec de la marine connu </a:t>
-            </a:r>
-          </a:p>
-          <a:p>
-            <a:r>
-              <a:rPr lang="fr-FR" sz="1400" dirty="0"/>
-              <a:t>pour son Bonnet rouge</a:t>
-            </a:r>
-          </a:p>
-          <a:p>
-            <a:r>
-              <a:rPr lang="fr-FR" sz="1400" dirty="0"/>
-              <a:t>Rend populaire </a:t>
-            </a:r>
-          </a:p>
-          <a:p>
-            <a:r>
-              <a:rPr lang="fr-FR" sz="1400" dirty="0"/>
-              <a:t>la ceinture de plomb</a:t>
-            </a:r>
-          </a:p>
-        </p:txBody>
-      </p:sp>
-      <p:sp>
-        <p:nvSpPr>
-          <p:cNvPr id="22" name="ZoneTexte 21">
-            <a:extLst>
-              <a:ext uri="{FF2B5EF4-FFF2-40B4-BE49-F238E27FC236}">
-                <a16:creationId xmlns:a16="http://schemas.microsoft.com/office/drawing/2014/main" id="{2621C0B5-3F2B-9C80-4E02-EC94094284D9}"/>
-              </a:ext>
-            </a:extLst>
-          </p:cNvPr>
-          <p:cNvSpPr txBox="1"/>
-          <p:nvPr/>
-        </p:nvSpPr>
-        <p:spPr>
-          <a:xfrm>
-            <a:off x="3243919" y="4243388"/>
-            <a:ext cx="678391" cy="369332"/>
-          </a:xfrm>
-          <a:prstGeom prst="rect">
-            <a:avLst/>
-          </a:prstGeom>
-          <a:noFill/>
-        </p:spPr>
-        <p:txBody>
-          <a:bodyPr wrap="none" rtlCol="0">
-            <a:spAutoFit/>
-          </a:bodyPr>
-          <a:lstStyle/>
-          <a:p>
-            <a:r>
-              <a:rPr lang="fr-FR" dirty="0"/>
-              <a:t>1990</a:t>
-            </a:r>
-          </a:p>
-        </p:txBody>
-      </p:sp>
-      <p:sp>
-        <p:nvSpPr>
-          <p:cNvPr id="23" name="ZoneTexte 22">
-            <a:extLst>
-              <a:ext uri="{FF2B5EF4-FFF2-40B4-BE49-F238E27FC236}">
-                <a16:creationId xmlns:a16="http://schemas.microsoft.com/office/drawing/2014/main" id="{76686AA3-9FD7-371D-6574-7C4DEAFA8AB0}"/>
-              </a:ext>
-            </a:extLst>
-          </p:cNvPr>
-          <p:cNvSpPr txBox="1"/>
-          <p:nvPr/>
-        </p:nvSpPr>
-        <p:spPr>
-          <a:xfrm>
-            <a:off x="3243919" y="4749551"/>
-            <a:ext cx="1810752" cy="523220"/>
-          </a:xfrm>
-          <a:prstGeom prst="rect">
-            <a:avLst/>
-          </a:prstGeom>
-          <a:noFill/>
-        </p:spPr>
-        <p:txBody>
-          <a:bodyPr wrap="none" rtlCol="0">
-            <a:spAutoFit/>
-          </a:bodyPr>
-          <a:lstStyle/>
-          <a:p>
-            <a:r>
-              <a:rPr lang="fr-FR" sz="1400" dirty="0"/>
-              <a:t>Plomb divorce de la</a:t>
-            </a:r>
-          </a:p>
-          <a:p>
-            <a:r>
-              <a:rPr lang="fr-FR" sz="1400" dirty="0"/>
-              <a:t>Ceinture pour la </a:t>
-            </a:r>
-            <a:r>
-              <a:rPr lang="fr-FR" sz="1400" dirty="0" err="1"/>
-              <a:t>stab</a:t>
-            </a:r>
-            <a:endParaRPr lang="fr-FR" sz="1400" dirty="0"/>
-          </a:p>
-        </p:txBody>
-      </p:sp>
-      <p:sp>
-        <p:nvSpPr>
-          <p:cNvPr id="24" name="ZoneTexte 23">
-            <a:extLst>
-              <a:ext uri="{FF2B5EF4-FFF2-40B4-BE49-F238E27FC236}">
-                <a16:creationId xmlns:a16="http://schemas.microsoft.com/office/drawing/2014/main" id="{6007FC3F-5614-DDA4-B04C-E77066EE92E6}"/>
-              </a:ext>
-            </a:extLst>
-          </p:cNvPr>
-          <p:cNvSpPr txBox="1"/>
-          <p:nvPr/>
-        </p:nvSpPr>
-        <p:spPr>
-          <a:xfrm>
-            <a:off x="950655" y="6415088"/>
-            <a:ext cx="8547212" cy="338554"/>
-          </a:xfrm>
-          <a:prstGeom prst="rect">
-            <a:avLst/>
-          </a:prstGeom>
-          <a:noFill/>
-        </p:spPr>
-        <p:txBody>
-          <a:bodyPr wrap="none" rtlCol="0">
-            <a:spAutoFit/>
-          </a:bodyPr>
-          <a:lstStyle/>
-          <a:p>
-            <a:r>
-              <a:rPr lang="fr-FR" sz="1600"/>
-              <a:t>Note: Densité </a:t>
-            </a:r>
+            <a:pPr marL="171450" indent="-171450">
+              <a:buFont typeface="Arial" panose="020B0604020202020204" pitchFamily="34" charset="0"/>
+              <a:buChar char="•"/>
+            </a:pPr>
             <a:r>
               <a:rPr lang="fr-FR" sz="1600" dirty="0"/>
-              <a:t>plomb: 11,34 Cours 1.2 euros / kg. --- Densité Or:  19,32 Cours 125 000 euros / kg</a:t>
-            </a:r>
-          </a:p>
-        </p:txBody>
-      </p:sp>
-      <p:sp>
-        <p:nvSpPr>
-          <p:cNvPr id="25" name="ZoneTexte 24">
-            <a:extLst>
-              <a:ext uri="{FF2B5EF4-FFF2-40B4-BE49-F238E27FC236}">
-                <a16:creationId xmlns:a16="http://schemas.microsoft.com/office/drawing/2014/main" id="{AD80448E-75F8-C85F-E770-C805C6A2385B}"/>
-              </a:ext>
-            </a:extLst>
-          </p:cNvPr>
-          <p:cNvSpPr txBox="1"/>
-          <p:nvPr/>
-        </p:nvSpPr>
-        <p:spPr>
-          <a:xfrm>
-            <a:off x="5933017" y="4306372"/>
-            <a:ext cx="678391" cy="369332"/>
-          </a:xfrm>
-          <a:prstGeom prst="rect">
-            <a:avLst/>
-          </a:prstGeom>
-          <a:noFill/>
-        </p:spPr>
-        <p:txBody>
-          <a:bodyPr wrap="none" rtlCol="0">
-            <a:spAutoFit/>
-          </a:bodyPr>
-          <a:lstStyle/>
-          <a:p>
-            <a:r>
-              <a:rPr lang="fr-FR" dirty="0"/>
-              <a:t>2005</a:t>
-            </a:r>
-          </a:p>
-        </p:txBody>
-      </p:sp>
-      <p:sp>
-        <p:nvSpPr>
-          <p:cNvPr id="26" name="ZoneTexte 25">
-            <a:extLst>
-              <a:ext uri="{FF2B5EF4-FFF2-40B4-BE49-F238E27FC236}">
-                <a16:creationId xmlns:a16="http://schemas.microsoft.com/office/drawing/2014/main" id="{176FE902-BD88-A727-90DA-71231D54CF45}"/>
-              </a:ext>
-            </a:extLst>
-          </p:cNvPr>
-          <p:cNvSpPr txBox="1"/>
-          <p:nvPr/>
-        </p:nvSpPr>
-        <p:spPr>
-          <a:xfrm>
-            <a:off x="5933017" y="4760654"/>
-            <a:ext cx="2240678" cy="954107"/>
-          </a:xfrm>
-          <a:prstGeom prst="rect">
-            <a:avLst/>
-          </a:prstGeom>
-          <a:noFill/>
-        </p:spPr>
-        <p:txBody>
-          <a:bodyPr wrap="none" rtlCol="0">
-            <a:spAutoFit/>
-          </a:bodyPr>
-          <a:lstStyle/>
-          <a:p>
-            <a:r>
-              <a:rPr lang="fr-FR" sz="1400" dirty="0"/>
-              <a:t>Donald propose</a:t>
-            </a:r>
-          </a:p>
-          <a:p>
-            <a:r>
-              <a:rPr lang="fr-FR" sz="1400" dirty="0"/>
-              <a:t>Lestage à l’or. Plus class,</a:t>
-            </a:r>
-          </a:p>
-          <a:p>
-            <a:r>
-              <a:rPr lang="fr-FR" sz="1400" dirty="0"/>
-              <a:t>Trop cher, trop </a:t>
-            </a:r>
-            <a:r>
-              <a:rPr lang="fr-FR" sz="1400" dirty="0" err="1"/>
-              <a:t>dangeureux</a:t>
-            </a:r>
-            <a:endParaRPr lang="fr-FR" sz="1400" dirty="0"/>
-          </a:p>
-          <a:p>
-            <a:r>
-              <a:rPr lang="fr-FR" sz="1400" dirty="0"/>
-              <a:t>C’est un flop</a:t>
-            </a:r>
-          </a:p>
-        </p:txBody>
-      </p:sp>
-      <p:sp>
-        <p:nvSpPr>
-          <p:cNvPr id="27" name="ZoneTexte 26">
-            <a:extLst>
-              <a:ext uri="{FF2B5EF4-FFF2-40B4-BE49-F238E27FC236}">
-                <a16:creationId xmlns:a16="http://schemas.microsoft.com/office/drawing/2014/main" id="{11143623-54CD-D254-E052-F771C662D1A1}"/>
-              </a:ext>
-            </a:extLst>
-          </p:cNvPr>
-          <p:cNvSpPr txBox="1"/>
-          <p:nvPr/>
-        </p:nvSpPr>
-        <p:spPr>
-          <a:xfrm>
-            <a:off x="8758238" y="4306372"/>
-            <a:ext cx="678391" cy="369332"/>
-          </a:xfrm>
-          <a:prstGeom prst="rect">
-            <a:avLst/>
-          </a:prstGeom>
-          <a:noFill/>
-        </p:spPr>
-        <p:txBody>
-          <a:bodyPr wrap="none" rtlCol="0">
-            <a:spAutoFit/>
-          </a:bodyPr>
-          <a:lstStyle/>
-          <a:p>
-            <a:r>
-              <a:rPr lang="fr-FR" dirty="0"/>
-              <a:t>2050</a:t>
-            </a:r>
-          </a:p>
-        </p:txBody>
-      </p:sp>
-      <p:sp>
-        <p:nvSpPr>
-          <p:cNvPr id="28" name="ZoneTexte 27">
-            <a:extLst>
-              <a:ext uri="{FF2B5EF4-FFF2-40B4-BE49-F238E27FC236}">
-                <a16:creationId xmlns:a16="http://schemas.microsoft.com/office/drawing/2014/main" id="{6920F200-758F-439A-3DC7-EA51A6287488}"/>
-              </a:ext>
-            </a:extLst>
-          </p:cNvPr>
-          <p:cNvSpPr txBox="1"/>
-          <p:nvPr/>
-        </p:nvSpPr>
-        <p:spPr>
-          <a:xfrm>
-            <a:off x="8758238" y="4760654"/>
-            <a:ext cx="2024337" cy="523220"/>
-          </a:xfrm>
-          <a:prstGeom prst="rect">
-            <a:avLst/>
-          </a:prstGeom>
-          <a:noFill/>
-        </p:spPr>
-        <p:txBody>
-          <a:bodyPr wrap="none" rtlCol="0">
-            <a:spAutoFit/>
-          </a:bodyPr>
-          <a:lstStyle/>
-          <a:p>
-            <a:r>
-              <a:rPr lang="fr-FR" sz="1400" dirty="0" err="1"/>
-              <a:t>Stab</a:t>
-            </a:r>
-            <a:r>
-              <a:rPr lang="fr-FR" sz="1400" dirty="0"/>
-              <a:t> à lestage </a:t>
-            </a:r>
-          </a:p>
-          <a:p>
-            <a:r>
-              <a:rPr lang="fr-FR" sz="1400" dirty="0"/>
-              <a:t>Dynamique gérée par IA</a:t>
+              <a:t>N3</a:t>
+            </a:r>
+          </a:p>
+          <a:p>
+            <a:pPr marL="628650" lvl="1" indent="-171450">
+              <a:buFont typeface="Arial" panose="020B0604020202020204" pitchFamily="34" charset="0"/>
+              <a:buChar char="•"/>
+            </a:pPr>
+            <a:r>
+              <a:rPr lang="fr-FR" sz="1600" dirty="0"/>
+              <a:t>Capelé 300m</a:t>
+            </a:r>
+          </a:p>
+          <a:p>
+            <a:pPr marL="628650" lvl="1" indent="-171450">
+              <a:buFont typeface="Arial" panose="020B0604020202020204" pitchFamily="34" charset="0"/>
+              <a:buChar char="•"/>
+            </a:pPr>
+            <a:r>
+              <a:rPr lang="fr-FR" sz="1600" dirty="0"/>
+              <a:t>Planification</a:t>
+            </a:r>
+          </a:p>
+          <a:p>
+            <a:pPr marL="628650" lvl="1" indent="-171450">
+              <a:buFont typeface="Arial" panose="020B0604020202020204" pitchFamily="34" charset="0"/>
+              <a:buChar char="•"/>
+            </a:pPr>
+            <a:r>
+              <a:rPr lang="fr-FR" sz="1600" dirty="0"/>
+              <a:t>Autonomie / Orientation</a:t>
+            </a:r>
+          </a:p>
+          <a:p>
+            <a:pPr marL="628650" lvl="1" indent="-171450">
+              <a:buFont typeface="Arial" panose="020B0604020202020204" pitchFamily="34" charset="0"/>
+              <a:buChar char="•"/>
+            </a:pPr>
+            <a:r>
+              <a:rPr lang="fr-FR" sz="1600" dirty="0"/>
+              <a:t>Gestion </a:t>
+            </a:r>
+            <a:r>
+              <a:rPr lang="fr-FR" sz="1600" dirty="0" err="1"/>
+              <a:t>desaturation</a:t>
+            </a:r>
+            <a:endParaRPr lang="fr-FR" sz="1600" dirty="0"/>
+          </a:p>
+          <a:p>
+            <a:pPr marL="628650" lvl="1" indent="-171450">
+              <a:buFont typeface="Arial" panose="020B0604020202020204" pitchFamily="34" charset="0"/>
+              <a:buChar char="•"/>
+            </a:pPr>
+            <a:r>
+              <a:rPr lang="fr-FR" sz="1600" dirty="0"/>
+              <a:t>IPD 40m 2 x 2</a:t>
             </a:r>
           </a:p>
         </p:txBody>
@@ -6563,7 +6120,7 @@
     </p:spTree>
     <p:extLst>
       <p:ext uri="{BB962C8B-B14F-4D97-AF65-F5344CB8AC3E}">
-        <p14:creationId xmlns:p14="http://schemas.microsoft.com/office/powerpoint/2010/main" val="2785862116"/>
+        <p14:creationId xmlns:p14="http://schemas.microsoft.com/office/powerpoint/2010/main" val="1859014569"/>
       </p:ext>
     </p:extLst>
   </p:cSld>
